--- a/TP2/docs/Presentacion.pptx
+++ b/TP2/docs/Presentacion.pptx
@@ -16744,7 +16744,7 @@
                 <a:cs typeface="Playfair Display"/>
                 <a:sym typeface="Playfair Display"/>
               </a:rPr>
-              <a:t>15</a:t>
+              <a:t>22</a:t>
             </a:r>
             <a:endParaRPr/>
           </a:p>
@@ -17068,7 +17068,7 @@
                 <a:cs typeface="Playfair Display"/>
                 <a:sym typeface="Playfair Display"/>
               </a:rPr>
-              <a:t>75</a:t>
+              <a:t>110</a:t>
             </a:r>
             <a:endParaRPr/>
           </a:p>
@@ -17392,7 +17392,7 @@
                 <a:cs typeface="Lato"/>
                 <a:sym typeface="Lato"/>
               </a:rPr>
-              <a:t>Tres brazos</a:t>
+              <a:t>Cuatro brazos</a:t>
             </a:r>
             <a:endParaRPr/>
           </a:p>
@@ -17419,7 +17419,7 @@
                 <a:cs typeface="Lato"/>
                 <a:sym typeface="Lato"/>
               </a:rPr>
-              <a:t>Selección (7 métodos) · supervivencia K/N (6 combinaciones) · control de cruza (2 celdas)</a:t>
+              <a:t>Selección (7 métodos, en padres y reemplazo) · selección solo en padres, reemplazo elite (7 métodos) · supervivencia K/N (6 combinaciones) · control de cruza (2 celdas)</a:t>
             </a:r>
             <a:endParaRPr/>
           </a:p>
@@ -22652,7 +22652,7 @@
                 <a:cs typeface="Lato"/>
                 <a:sym typeface="Lato"/>
               </a:rPr>
-              <a:t>Los dos retratos quedan fuera de la matriz formal de 75 corridas: son de dominio público, vía Wikimedia Commons, y están para variar la complejidad del objetivo.</a:t>
+              <a:t>Los dos retratos quedan fuera de la matriz formal de 110 corridas: son de dominio público, vía Wikimedia Commons, y están para variar la complejidad del objetivo.</a:t>
             </a:r>
             <a:endParaRPr/>
           </a:p>
@@ -23026,7 +23026,7 @@
                 <a:cs typeface="Lato"/>
                 <a:sym typeface="Lato"/>
               </a:rPr>
-              <a:t>Solo sirven los que desacoplan la probabilidad de la escala del fitness: ranking, elite y torneos. Ranking termina primero; elite llega más rápido.</a:t>
+              <a:t>Los basados en orden (ranking, elite, torneos) funcionan sobre el fitness crudo; ranking termina primero y elite llega más rápido. Los proporcionales no son peores: sirven igual una vez corregida la escala, y sin elitismo llegan a 0,96 reescalando y a 0,97 con Boltzmann a Tc = 0,002.</a:t>
             </a:r>
             <a:endParaRPr/>
           </a:p>
@@ -24616,7 +24616,7 @@
                 <a:cs typeface="Lato"/>
                 <a:sym typeface="Lato"/>
               </a:rPr>
-              <a:t>Las 75 corridas son todas sobre la bandera. Los otros objetivos quedaron fuera del diseño formal.</a:t>
+              <a:t>Las 110 corridas son todas sobre la bandera. Los otros objetivos quedaron fuera del diseño formal.</a:t>
             </a:r>
             <a:endParaRPr/>
           </a:p>
@@ -24725,7 +24725,7 @@
                 <a:cs typeface="Lato"/>
                 <a:sym typeface="Lato"/>
               </a:rPr>
-              <a:t>Boltzmann mal escalado</a:t>
+              <a:t>Boltzmann mal escalado — barrido y corregido</a:t>
             </a:r>
             <a:endParaRPr/>
           </a:p>
@@ -24752,7 +24752,7 @@
                 <a:cs typeface="Lato"/>
                 <a:sym typeface="Lato"/>
               </a:rPr>
-              <a:t>T0 = 5,0 y Tc = 0,5 son enormes frente a un spread de fitness de 0,14. Haría falta T del orden de 0,01.</a:t>
+              <a:t>T0 = 5,0 y Tc = 0,5 son enormes frente a un spread de fitness de 0,14. Barrimos T0, Tc y k sobre 110 corridas: Tc domina y las otras dos casi no pesan. Bajarla a 0,002 lleva Boltzmann de 0,72 a 0,97, sin elitismo.</a:t>
             </a:r>
             <a:endParaRPr/>
           </a:p>
@@ -24861,7 +24861,7 @@
                 <a:cs typeface="Lato"/>
                 <a:sym typeface="Lato"/>
               </a:rPr>
-              <a:t>Reescalar el fitness</a:t>
+              <a:t>Reescalar el fitness — implementado</a:t>
             </a:r>
             <a:endParaRPr/>
           </a:p>
@@ -24888,7 +24888,7 @@
                 <a:cs typeface="Lato"/>
                 <a:sym typeface="Lato"/>
               </a:rPr>
-              <a:t>Es el cambio de mayor impacto: recuperaría ruleta, universal y Boltzmann como métodos utilizables.</a:t>
+              <a:t>Confirmado: restarle el piso a la población recupera los tres. Sin elitismo, ruleta pasa de 0,72 a 0,96 y universal de 0,74 a 0,97. Queda como opción de configuración: el default sigue siendo la definición de la cátedra.</a:t>
             </a:r>
             <a:endParaRPr/>
           </a:p>

--- a/TP2/docs/Presentacion.pptx
+++ b/TP2/docs/Presentacion.pptx
@@ -25,6 +25,8 @@
     <p:sldId id="270" r:id="rId21"/>
     <p:sldId id="271" r:id="rId22"/>
     <p:sldId id="272" r:id="rId23"/>
+    <p:sldId id="285" r:id="rId44"/>
+    <p:sldId id="286" r:id="rId45"/>
     <p:sldId id="273" r:id="rId24"/>
     <p:sldId id="274" r:id="rId25"/>
     <p:sldId id="275" r:id="rId26"/>
@@ -18360,7 +18362,7 @@
                 <a:cs typeface="Lato"/>
                 <a:sym typeface="Lato"/>
               </a:rPr>
-              <a:t>18</a:t>
+              <a:t>20</a:t>
             </a:r>
             <a:endParaRPr/>
           </a:p>
@@ -18897,7 +18899,7 @@
                 <a:cs typeface="Lato"/>
                 <a:sym typeface="Lato"/>
               </a:rPr>
-              <a:t>19</a:t>
+              <a:t>21</a:t>
             </a:r>
             <a:endParaRPr/>
           </a:p>
@@ -19530,7 +19532,7 @@
                 <a:cs typeface="Lato"/>
                 <a:sym typeface="Lato"/>
               </a:rPr>
-              <a:t>20</a:t>
+              <a:t>22</a:t>
             </a:r>
             <a:endParaRPr/>
           </a:p>
@@ -20067,7 +20069,7 @@
                 <a:cs typeface="Lato"/>
                 <a:sym typeface="Lato"/>
               </a:rPr>
-              <a:t>21</a:t>
+              <a:t>23</a:t>
             </a:r>
             <a:endParaRPr/>
           </a:p>
@@ -20438,7 +20440,7 @@
                 <a:cs typeface="Lato"/>
                 <a:sym typeface="Lato"/>
               </a:rPr>
-              <a:t>22</a:t>
+              <a:t>24</a:t>
             </a:r>
             <a:endParaRPr/>
           </a:p>
@@ -20975,7 +20977,7 @@
                 <a:cs typeface="Lato"/>
                 <a:sym typeface="Lato"/>
               </a:rPr>
-              <a:t>23</a:t>
+              <a:t>25</a:t>
             </a:r>
             <a:endParaRPr/>
           </a:p>
@@ -21512,7 +21514,7 @@
                 <a:cs typeface="Lato"/>
                 <a:sym typeface="Lato"/>
               </a:rPr>
-              <a:t>24</a:t>
+              <a:t>26</a:t>
             </a:r>
             <a:endParaRPr/>
           </a:p>
@@ -22079,7 +22081,7 @@
                 <a:cs typeface="Lato"/>
                 <a:sym typeface="Lato"/>
               </a:rPr>
-              <a:t>25</a:t>
+              <a:t>27</a:t>
             </a:r>
             <a:endParaRPr/>
           </a:p>
@@ -22784,7 +22786,7 @@
                 <a:cs typeface="Lato"/>
                 <a:sym typeface="Lato"/>
               </a:rPr>
-              <a:t>26</a:t>
+              <a:t>28</a:t>
             </a:r>
             <a:endParaRPr/>
           </a:p>
@@ -23566,7 +23568,7 @@
                 <a:cs typeface="Lato"/>
                 <a:sym typeface="Lato"/>
               </a:rPr>
-              <a:t>27</a:t>
+              <a:t>29</a:t>
             </a:r>
             <a:endParaRPr/>
           </a:p>
@@ -24374,7 +24376,7 @@
                 <a:cs typeface="Lato"/>
                 <a:sym typeface="Lato"/>
               </a:rPr>
-              <a:t>28</a:t>
+              <a:t>30</a:t>
             </a:r>
             <a:endParaRPr/>
           </a:p>
@@ -26038,6 +26040,1080 @@
                 <a:sym typeface="Lato"/>
               </a:rPr>
               <a:t>El orden no es cosmético: es lo que le da sentido a mutar un escalón de densidad en vez de saltar a un carácter arbitrario.</a:t>
+            </a:r>
+            <a:endParaRPr/>
+          </a:p>
+        </p:txBody>
+      </p:sp>
+    </p:spTree>
+  </p:cSld>
+  <p:clrMapOvr>
+    <a:masterClrMapping/>
+  </p:clrMapOvr>
+</p:sld>
+</file>
+
+<file path=ppt/slides/slide30.xml><?xml version="1.0" encoding="utf-8"?>
+<p:sld xmlns:a="http://schemas.openxmlformats.org/drawingml/2006/main" xmlns:r="http://schemas.openxmlformats.org/officeDocument/2006/relationships" xmlns:mc="http://schemas.openxmlformats.org/markup-compatibility/2006" xmlns:mv="urn:schemas-microsoft-com:mac:vml" xmlns:p="http://schemas.openxmlformats.org/presentationml/2006/main" xmlns:c="http://schemas.openxmlformats.org/drawingml/2006/chart" xmlns:dgm="http://schemas.openxmlformats.org/drawingml/2006/diagram" xmlns:o="urn:schemas-microsoft-com:office:office" xmlns:v="urn:schemas-microsoft-com:vml" xmlns:pvml="urn:schemas-microsoft-com:office:powerpoint" xmlns:com="http://schemas.openxmlformats.org/drawingml/2006/compatibility" xmlns:p14="http://schemas.microsoft.com/office/powerpoint/2010/main" xmlns:p15="http://schemas.microsoft.com/office/powerpoint/2012/main" xmlns:ahyp="http://schemas.microsoft.com/office/drawing/2018/hyperlinkcolor">
+  <p:cSld>
+    <p:spTree>
+      <p:nvGrpSpPr>
+        <p:cNvPr id="357" name="Shape 357"/>
+        <p:cNvGrpSpPr/>
+        <p:nvPr/>
+      </p:nvGrpSpPr>
+      <p:grpSpPr>
+        <a:xfrm>
+          <a:off x="0" y="0"/>
+          <a:ext cx="0" cy="0"/>
+          <a:chOff x="0" y="0"/>
+          <a:chExt cx="0" cy="0"/>
+        </a:xfrm>
+      </p:grpSpPr>
+      <p:sp>
+        <p:nvSpPr>
+          <p:cNvPr id="358" name="Google Shape;358;p29"/>
+          <p:cNvSpPr/>
+          <p:nvPr/>
+        </p:nvSpPr>
+        <p:spPr>
+          <a:xfrm>
+            <a:off x="0" y="5047488"/>
+            <a:ext cx="9144000" cy="100500"/>
+          </a:xfrm>
+          <a:prstGeom prst="rect">
+            <a:avLst/>
+          </a:prstGeom>
+          <a:solidFill>
+            <a:srgbClr val="F55E61"/>
+          </a:solidFill>
+          <a:ln>
+            <a:noFill/>
+          </a:ln>
+        </p:spPr>
+        <p:txBody>
+          <a:bodyPr anchorCtr="0" anchor="ctr" bIns="45700" lIns="91425" spcFirstLastPara="1" rIns="91425" wrap="square" tIns="45700">
+            <a:noAutofit/>
+          </a:bodyPr>
+          <a:lstStyle/>
+          <a:p>
+            <a:pPr indent="0" lvl="0" marL="0" marR="0" rtl="0" algn="ctr">
+              <a:lnSpc>
+                <a:spcPct val="100000"/>
+              </a:lnSpc>
+              <a:spcBef>
+                <a:spcPts val="0"/>
+              </a:spcBef>
+              <a:spcAft>
+                <a:spcPts val="0"/>
+              </a:spcAft>
+              <a:buNone/>
+            </a:pPr>
+            <a:r>
+              <a:t/>
+            </a:r>
+            <a:endParaRPr b="0" i="0" sz="1400" u="none" cap="none" strike="noStrike">
+              <a:solidFill>
+                <a:srgbClr val="000000"/>
+              </a:solidFill>
+              <a:latin typeface="Arial"/>
+              <a:ea typeface="Arial"/>
+              <a:cs typeface="Arial"/>
+              <a:sym typeface="Arial"/>
+            </a:endParaRPr>
+          </a:p>
+        </p:txBody>
+      </p:sp>
+      <p:sp>
+        <p:nvSpPr>
+          <p:cNvPr id="359" name="Google Shape;359;p29"/>
+          <p:cNvSpPr txBox="1"/>
+          <p:nvPr/>
+        </p:nvSpPr>
+        <p:spPr>
+          <a:xfrm>
+            <a:off x="7863840" y="4700016"/>
+            <a:ext cx="969300" cy="138600"/>
+          </a:xfrm>
+          <a:prstGeom prst="rect">
+            <a:avLst/>
+          </a:prstGeom>
+          <a:noFill/>
+          <a:ln>
+            <a:noFill/>
+          </a:ln>
+        </p:spPr>
+        <p:txBody>
+          <a:bodyPr anchorCtr="0" anchor="t" bIns="0" lIns="0" spcFirstLastPara="1" rIns="0" wrap="square" tIns="0">
+            <a:spAutoFit/>
+          </a:bodyPr>
+          <a:lstStyle/>
+          <a:p>
+            <a:pPr indent="0" lvl="0" marL="0" marR="0" rtl="0" algn="r">
+              <a:lnSpc>
+                <a:spcPct val="100000"/>
+              </a:lnSpc>
+              <a:spcBef>
+                <a:spcPts val="0"/>
+              </a:spcBef>
+              <a:spcAft>
+                <a:spcPts val="0"/>
+              </a:spcAft>
+              <a:buNone/>
+            </a:pPr>
+            <a:r>
+              <a:rPr b="0" i="0" lang="en-GB" sz="900" u="none" cap="none" strike="noStrike">
+                <a:solidFill>
+                  <a:srgbClr val="BFC7CA"/>
+                </a:solidFill>
+                <a:latin typeface="Lato"/>
+                <a:ea typeface="Lato"/>
+                <a:cs typeface="Lato"/>
+                <a:sym typeface="Lato"/>
+              </a:rPr>
+              <a:t>18</a:t>
+            </a:r>
+            <a:endParaRPr/>
+          </a:p>
+        </p:txBody>
+      </p:sp>
+      <p:sp>
+        <p:nvSpPr>
+          <p:cNvPr id="360" name="Google Shape;360;p29"/>
+          <p:cNvSpPr txBox="1"/>
+          <p:nvPr/>
+        </p:nvSpPr>
+        <p:spPr>
+          <a:xfrm>
+            <a:off x="310896" y="310896"/>
+            <a:ext cx="8522100" cy="400200"/>
+          </a:xfrm>
+          <a:prstGeom prst="rect">
+            <a:avLst/>
+          </a:prstGeom>
+          <a:noFill/>
+          <a:ln>
+            <a:noFill/>
+          </a:ln>
+        </p:spPr>
+        <p:txBody>
+          <a:bodyPr anchorCtr="0" anchor="t" bIns="0" lIns="0" spcFirstLastPara="1" rIns="0" wrap="square" tIns="0">
+            <a:spAutoFit/>
+          </a:bodyPr>
+          <a:lstStyle/>
+          <a:p>
+            <a:pPr indent="0" lvl="0" marL="0" marR="0" rtl="0" algn="l">
+              <a:lnSpc>
+                <a:spcPct val="100000"/>
+              </a:lnSpc>
+              <a:spcBef>
+                <a:spcPts val="0"/>
+              </a:spcBef>
+              <a:spcAft>
+                <a:spcPts val="0"/>
+              </a:spcAft>
+              <a:buNone/>
+            </a:pPr>
+            <a:r>
+              <a:rPr b="1" i="0" lang="en-GB" sz="2600" u="none" cap="none" strike="noStrike">
+                <a:solidFill>
+                  <a:srgbClr val="F55E61"/>
+                </a:solidFill>
+                <a:latin typeface="Playfair Display"/>
+                <a:ea typeface="Playfair Display"/>
+                <a:cs typeface="Playfair Display"/>
+                <a:sym typeface="Playfair Display"/>
+              </a:rPr>
+              <a:t>Selección: padres contra reemplazo</a:t>
+            </a:r>
+            <a:endParaRPr/>
+          </a:p>
+        </p:txBody>
+      </p:sp>
+      <p:sp>
+        <p:nvSpPr>
+          <p:cNvPr id="361" name="Google Shape;361;p29"/>
+          <p:cNvSpPr txBox="1"/>
+          <p:nvPr/>
+        </p:nvSpPr>
+        <p:spPr>
+          <a:xfrm>
+            <a:off x="310896" y="841248"/>
+            <a:ext cx="8522100" cy="169200"/>
+          </a:xfrm>
+          <a:prstGeom prst="rect">
+            <a:avLst/>
+          </a:prstGeom>
+          <a:noFill/>
+          <a:ln>
+            <a:noFill/>
+          </a:ln>
+        </p:spPr>
+        <p:txBody>
+          <a:bodyPr anchorCtr="0" anchor="t" bIns="0" lIns="0" spcFirstLastPara="1" rIns="0" wrap="square" tIns="0">
+            <a:spAutoFit/>
+          </a:bodyPr>
+          <a:lstStyle/>
+          <a:p>
+            <a:pPr indent="0" lvl="0" marL="0" marR="0" rtl="0" algn="l">
+              <a:lnSpc>
+                <a:spcPct val="100000"/>
+              </a:lnSpc>
+              <a:spcBef>
+                <a:spcPts val="0"/>
+              </a:spcBef>
+              <a:spcAft>
+                <a:spcPts val="0"/>
+              </a:spcAft>
+              <a:buNone/>
+            </a:pPr>
+            <a:r>
+              <a:rPr b="0" i="0" lang="en-GB" sz="1100" u="none" cap="none" strike="noStrike">
+                <a:solidFill>
+                  <a:srgbClr val="BFC7CA"/>
+                </a:solidFill>
+                <a:latin typeface="Lato"/>
+                <a:ea typeface="Lato"/>
+                <a:cs typeface="Lato"/>
+                <a:sym typeface="Lato"/>
+              </a:rPr>
+              <a:t>Ejercicio 2 · Resultados</a:t>
+            </a:r>
+            <a:endParaRPr/>
+          </a:p>
+        </p:txBody>
+      </p:sp>
+      <p:pic>
+        <p:nvPicPr>
+          <p:cNvPr descr="fig_seleccion.png" id="362" name="Google Shape;362;p29"/>
+          <p:cNvPicPr preferRelativeResize="0"/>
+          <p:nvPr/>
+        </p:nvPicPr>
+        <p:blipFill rotWithShape="1">
+          <a:blip r:embed="rId3">
+            <a:alphaModFix/>
+          </a:blip>
+          <a:srcRect b="0" l="0" r="0" t="0"/>
+          <a:stretch/>
+        </p:blipFill>
+        <p:spPr>
+          <a:xfrm>
+            <a:off x="829504" y="1207008"/>
+            <a:ext cx="4494905" cy="2946456"/>
+          </a:xfrm>
+          <a:prstGeom prst="rect">
+            <a:avLst/>
+          </a:prstGeom>
+          <a:noFill/>
+          <a:ln>
+            <a:noFill/>
+          </a:ln>
+        </p:spPr>
+      </p:pic>
+      <p:sp>
+        <p:nvSpPr>
+          <p:cNvPr id="363" name="Google Shape;363;p29"/>
+          <p:cNvSpPr/>
+          <p:nvPr/>
+        </p:nvSpPr>
+        <p:spPr>
+          <a:xfrm>
+            <a:off x="6053328" y="1207008"/>
+            <a:ext cx="2779800" cy="1417200"/>
+          </a:xfrm>
+          <a:prstGeom prst="roundRect">
+            <a:avLst>
+              <a:gd fmla="val 7000" name="adj"/>
+            </a:avLst>
+          </a:prstGeom>
+          <a:solidFill>
+            <a:srgbClr val="F2F4F5"/>
+          </a:solidFill>
+          <a:ln>
+            <a:noFill/>
+          </a:ln>
+        </p:spPr>
+        <p:txBody>
+          <a:bodyPr anchorCtr="0" anchor="ctr" bIns="45700" lIns="91425" spcFirstLastPara="1" rIns="91425" wrap="square" tIns="45700">
+            <a:noAutofit/>
+          </a:bodyPr>
+          <a:lstStyle/>
+          <a:p>
+            <a:pPr indent="0" lvl="0" marL="0" marR="0" rtl="0" algn="ctr">
+              <a:lnSpc>
+                <a:spcPct val="100000"/>
+              </a:lnSpc>
+              <a:spcBef>
+                <a:spcPts val="0"/>
+              </a:spcBef>
+              <a:spcAft>
+                <a:spcPts val="0"/>
+              </a:spcAft>
+              <a:buNone/>
+            </a:pPr>
+            <a:r>
+              <a:t/>
+            </a:r>
+            <a:endParaRPr b="0" i="0" sz="1400" u="none" cap="none" strike="noStrike">
+              <a:solidFill>
+                <a:srgbClr val="000000"/>
+              </a:solidFill>
+              <a:latin typeface="Arial"/>
+              <a:ea typeface="Arial"/>
+              <a:cs typeface="Arial"/>
+              <a:sym typeface="Arial"/>
+            </a:endParaRPr>
+          </a:p>
+        </p:txBody>
+      </p:sp>
+      <p:sp>
+        <p:nvSpPr>
+          <p:cNvPr id="364" name="Google Shape;364;p29"/>
+          <p:cNvSpPr txBox="1"/>
+          <p:nvPr/>
+        </p:nvSpPr>
+        <p:spPr>
+          <a:xfrm>
+            <a:off x="6199632" y="1353312"/>
+            <a:ext cx="2487300" cy="697800"/>
+          </a:xfrm>
+          <a:prstGeom prst="rect">
+            <a:avLst/>
+          </a:prstGeom>
+          <a:noFill/>
+          <a:ln>
+            <a:noFill/>
+          </a:ln>
+        </p:spPr>
+        <p:txBody>
+          <a:bodyPr anchorCtr="0" anchor="t" bIns="0" lIns="0" spcFirstLastPara="1" rIns="0" wrap="square" tIns="0">
+            <a:spAutoFit/>
+          </a:bodyPr>
+          <a:lstStyle/>
+          <a:p>
+            <a:pPr indent="0" lvl="0" marL="0" marR="0" rtl="0" algn="l">
+              <a:lnSpc>
+                <a:spcPct val="100000"/>
+              </a:lnSpc>
+              <a:spcBef>
+                <a:spcPts val="0"/>
+              </a:spcBef>
+              <a:spcAft>
+                <a:spcPts val="0"/>
+              </a:spcAft>
+              <a:buNone/>
+            </a:pPr>
+            <a:r>
+              <a:rPr b="1" i="0" lang="en-GB" sz="1050" u="none" cap="none" strike="noStrike">
+                <a:solidFill>
+                  <a:srgbClr val="F55E61"/>
+                </a:solidFill>
+                <a:latin typeface="Lato"/>
+                <a:ea typeface="Lato"/>
+                <a:cs typeface="Lato"/>
+                <a:sym typeface="Lato"/>
+              </a:rPr>
+              <a:t>El reemplazo es el que decide</a:t>
+            </a:r>
+            <a:endParaRPr/>
+          </a:p>
+          <a:p>
+            <a:pPr indent="0" lvl="0" marL="0" marR="0" rtl="0" algn="l">
+              <a:lnSpc>
+                <a:spcPct val="100000"/>
+              </a:lnSpc>
+              <a:spcBef>
+                <a:spcPts val="400"/>
+              </a:spcBef>
+              <a:spcAft>
+                <a:spcPts val="0"/>
+              </a:spcAft>
+              <a:buNone/>
+            </a:pPr>
+            <a:r>
+              <a:rPr b="0" i="0" lang="en-GB" sz="1050" u="none" cap="none" strike="noStrike">
+                <a:solidFill>
+                  <a:srgbClr val="5E696C"/>
+                </a:solidFill>
+                <a:latin typeface="Lato"/>
+                <a:ea typeface="Lato"/>
+                <a:cs typeface="Lato"/>
+                <a:sym typeface="Lato"/>
+              </a:rPr>
+              <a:t>Los mismos 7 métodos. Si el método gobierna padres y reemplazo, ruleta, universal y Boltzmann se quedan planos. Restringidos a la selección de padres, con reemplazo elite, los siete terminan entre 0,973 y 0,986.</a:t>
+            </a:r>
+            <a:endParaRPr/>
+          </a:p>
+        </p:txBody>
+      </p:sp>
+      <p:sp>
+        <p:nvSpPr>
+          <p:cNvPr id="365" name="Google Shape;365;p29"/>
+          <p:cNvSpPr/>
+          <p:nvPr/>
+        </p:nvSpPr>
+        <p:spPr>
+          <a:xfrm>
+            <a:off x="6053328" y="2743200"/>
+            <a:ext cx="2779800" cy="1417200"/>
+          </a:xfrm>
+          <a:prstGeom prst="roundRect">
+            <a:avLst>
+              <a:gd fmla="val 7000" name="adj"/>
+            </a:avLst>
+          </a:prstGeom>
+          <a:solidFill>
+            <a:srgbClr val="F2F4F5"/>
+          </a:solidFill>
+          <a:ln>
+            <a:noFill/>
+          </a:ln>
+        </p:spPr>
+        <p:txBody>
+          <a:bodyPr anchorCtr="0" anchor="ctr" bIns="45700" lIns="91425" spcFirstLastPara="1" rIns="91425" wrap="square" tIns="45700">
+            <a:noAutofit/>
+          </a:bodyPr>
+          <a:lstStyle/>
+          <a:p>
+            <a:pPr indent="0" lvl="0" marL="0" marR="0" rtl="0" algn="ctr">
+              <a:lnSpc>
+                <a:spcPct val="100000"/>
+              </a:lnSpc>
+              <a:spcBef>
+                <a:spcPts val="0"/>
+              </a:spcBef>
+              <a:spcAft>
+                <a:spcPts val="0"/>
+              </a:spcAft>
+              <a:buNone/>
+            </a:pPr>
+            <a:r>
+              <a:t/>
+            </a:r>
+            <a:endParaRPr b="0" i="0" sz="1400" u="none" cap="none" strike="noStrike">
+              <a:solidFill>
+                <a:srgbClr val="000000"/>
+              </a:solidFill>
+              <a:latin typeface="Arial"/>
+              <a:ea typeface="Arial"/>
+              <a:cs typeface="Arial"/>
+              <a:sym typeface="Arial"/>
+            </a:endParaRPr>
+          </a:p>
+        </p:txBody>
+      </p:sp>
+      <p:sp>
+        <p:nvSpPr>
+          <p:cNvPr id="366" name="Google Shape;366;p29"/>
+          <p:cNvSpPr txBox="1"/>
+          <p:nvPr/>
+        </p:nvSpPr>
+        <p:spPr>
+          <a:xfrm>
+            <a:off x="6199632" y="2889504"/>
+            <a:ext cx="2487300" cy="697800"/>
+          </a:xfrm>
+          <a:prstGeom prst="rect">
+            <a:avLst/>
+          </a:prstGeom>
+          <a:noFill/>
+          <a:ln>
+            <a:noFill/>
+          </a:ln>
+        </p:spPr>
+        <p:txBody>
+          <a:bodyPr anchorCtr="0" anchor="t" bIns="0" lIns="0" spcFirstLastPara="1" rIns="0" wrap="square" tIns="0">
+            <a:spAutoFit/>
+          </a:bodyPr>
+          <a:lstStyle/>
+          <a:p>
+            <a:pPr indent="0" lvl="0" marL="0" marR="0" rtl="0" algn="l">
+              <a:lnSpc>
+                <a:spcPct val="100000"/>
+              </a:lnSpc>
+              <a:spcBef>
+                <a:spcPts val="0"/>
+              </a:spcBef>
+              <a:spcAft>
+                <a:spcPts val="0"/>
+              </a:spcAft>
+              <a:buNone/>
+            </a:pPr>
+            <a:r>
+              <a:rPr b="1" i="0" lang="en-GB" sz="1050" u="none" cap="none" strike="noStrike">
+                <a:solidFill>
+                  <a:srgbClr val="F55E61"/>
+                </a:solidFill>
+                <a:latin typeface="Lato"/>
+                <a:ea typeface="Lato"/>
+                <a:cs typeface="Lato"/>
+                <a:sym typeface="Lato"/>
+              </a:rPr>
+              <a:t>Por qué</a:t>
+            </a:r>
+            <a:endParaRPr/>
+          </a:p>
+          <a:p>
+            <a:pPr indent="0" lvl="0" marL="0" marR="0" rtl="0" algn="l">
+              <a:lnSpc>
+                <a:spcPct val="100000"/>
+              </a:lnSpc>
+              <a:spcBef>
+                <a:spcPts val="400"/>
+              </a:spcBef>
+              <a:spcAft>
+                <a:spcPts val="0"/>
+              </a:spcAft>
+              <a:buNone/>
+            </a:pPr>
+            <a:r>
+              <a:rPr b="0" i="0" lang="en-GB" sz="1050" u="none" cap="none" strike="noStrike">
+                <a:solidFill>
+                  <a:srgbClr val="5E696C"/>
+                </a:solidFill>
+                <a:latin typeface="Lato"/>
+                <a:ea typeface="Lato"/>
+                <a:cs typeface="Lato"/>
+                <a:sym typeface="Lato"/>
+              </a:rPr>
+              <a:t>Un padre débil sólo cuesta velocidad: los buenos siguen en la población y se los puede volver a elegir. Un reemplazo débil los descarta. Con ruleta, el mejor individuo sobrevive 0,46 veces por generación.</a:t>
+            </a:r>
+            <a:endParaRPr/>
+          </a:p>
+        </p:txBody>
+      </p:sp>
+    </p:spTree>
+  </p:cSld>
+  <p:clrMapOvr>
+    <a:masterClrMapping/>
+  </p:clrMapOvr>
+</p:sld>
+</file>
+
+<file path=ppt/slides/slide31.xml><?xml version="1.0" encoding="utf-8"?>
+<p:sld xmlns:a="http://schemas.openxmlformats.org/drawingml/2006/main" xmlns:r="http://schemas.openxmlformats.org/officeDocument/2006/relationships" xmlns:mc="http://schemas.openxmlformats.org/markup-compatibility/2006" xmlns:mv="urn:schemas-microsoft-com:mac:vml" xmlns:p="http://schemas.openxmlformats.org/presentationml/2006/main" xmlns:c="http://schemas.openxmlformats.org/drawingml/2006/chart" xmlns:dgm="http://schemas.openxmlformats.org/drawingml/2006/diagram" xmlns:o="urn:schemas-microsoft-com:office:office" xmlns:v="urn:schemas-microsoft-com:vml" xmlns:pvml="urn:schemas-microsoft-com:office:powerpoint" xmlns:com="http://schemas.openxmlformats.org/drawingml/2006/compatibility" xmlns:p14="http://schemas.microsoft.com/office/powerpoint/2010/main" xmlns:p15="http://schemas.microsoft.com/office/powerpoint/2012/main" xmlns:ahyp="http://schemas.microsoft.com/office/drawing/2018/hyperlinkcolor">
+  <p:cSld>
+    <p:spTree>
+      <p:nvGrpSpPr>
+        <p:cNvPr id="357" name="Shape 357"/>
+        <p:cNvGrpSpPr/>
+        <p:nvPr/>
+      </p:nvGrpSpPr>
+      <p:grpSpPr>
+        <a:xfrm>
+          <a:off x="0" y="0"/>
+          <a:ext cx="0" cy="0"/>
+          <a:chOff x="0" y="0"/>
+          <a:chExt cx="0" cy="0"/>
+        </a:xfrm>
+      </p:grpSpPr>
+      <p:sp>
+        <p:nvSpPr>
+          <p:cNvPr id="358" name="Google Shape;358;p29"/>
+          <p:cNvSpPr/>
+          <p:nvPr/>
+        </p:nvSpPr>
+        <p:spPr>
+          <a:xfrm>
+            <a:off x="0" y="5047488"/>
+            <a:ext cx="9144000" cy="100500"/>
+          </a:xfrm>
+          <a:prstGeom prst="rect">
+            <a:avLst/>
+          </a:prstGeom>
+          <a:solidFill>
+            <a:srgbClr val="F55E61"/>
+          </a:solidFill>
+          <a:ln>
+            <a:noFill/>
+          </a:ln>
+        </p:spPr>
+        <p:txBody>
+          <a:bodyPr anchorCtr="0" anchor="ctr" bIns="45700" lIns="91425" spcFirstLastPara="1" rIns="91425" wrap="square" tIns="45700">
+            <a:noAutofit/>
+          </a:bodyPr>
+          <a:lstStyle/>
+          <a:p>
+            <a:pPr indent="0" lvl="0" marL="0" marR="0" rtl="0" algn="ctr">
+              <a:lnSpc>
+                <a:spcPct val="100000"/>
+              </a:lnSpc>
+              <a:spcBef>
+                <a:spcPts val="0"/>
+              </a:spcBef>
+              <a:spcAft>
+                <a:spcPts val="0"/>
+              </a:spcAft>
+              <a:buNone/>
+            </a:pPr>
+            <a:r>
+              <a:t/>
+            </a:r>
+            <a:endParaRPr b="0" i="0" sz="1400" u="none" cap="none" strike="noStrike">
+              <a:solidFill>
+                <a:srgbClr val="000000"/>
+              </a:solidFill>
+              <a:latin typeface="Arial"/>
+              <a:ea typeface="Arial"/>
+              <a:cs typeface="Arial"/>
+              <a:sym typeface="Arial"/>
+            </a:endParaRPr>
+          </a:p>
+        </p:txBody>
+      </p:sp>
+      <p:sp>
+        <p:nvSpPr>
+          <p:cNvPr id="359" name="Google Shape;359;p29"/>
+          <p:cNvSpPr txBox="1"/>
+          <p:nvPr/>
+        </p:nvSpPr>
+        <p:spPr>
+          <a:xfrm>
+            <a:off x="7863840" y="4700016"/>
+            <a:ext cx="969300" cy="138600"/>
+          </a:xfrm>
+          <a:prstGeom prst="rect">
+            <a:avLst/>
+          </a:prstGeom>
+          <a:noFill/>
+          <a:ln>
+            <a:noFill/>
+          </a:ln>
+        </p:spPr>
+        <p:txBody>
+          <a:bodyPr anchorCtr="0" anchor="t" bIns="0" lIns="0" spcFirstLastPara="1" rIns="0" wrap="square" tIns="0">
+            <a:spAutoFit/>
+          </a:bodyPr>
+          <a:lstStyle/>
+          <a:p>
+            <a:pPr indent="0" lvl="0" marL="0" marR="0" rtl="0" algn="r">
+              <a:lnSpc>
+                <a:spcPct val="100000"/>
+              </a:lnSpc>
+              <a:spcBef>
+                <a:spcPts val="0"/>
+              </a:spcBef>
+              <a:spcAft>
+                <a:spcPts val="0"/>
+              </a:spcAft>
+              <a:buNone/>
+            </a:pPr>
+            <a:r>
+              <a:rPr b="0" i="0" lang="en-GB" sz="900" u="none" cap="none" strike="noStrike">
+                <a:solidFill>
+                  <a:srgbClr val="BFC7CA"/>
+                </a:solidFill>
+                <a:latin typeface="Lato"/>
+                <a:ea typeface="Lato"/>
+                <a:cs typeface="Lato"/>
+                <a:sym typeface="Lato"/>
+              </a:rPr>
+              <a:t>19</a:t>
+            </a:r>
+            <a:endParaRPr/>
+          </a:p>
+        </p:txBody>
+      </p:sp>
+      <p:sp>
+        <p:nvSpPr>
+          <p:cNvPr id="360" name="Google Shape;360;p29"/>
+          <p:cNvSpPr txBox="1"/>
+          <p:nvPr/>
+        </p:nvSpPr>
+        <p:spPr>
+          <a:xfrm>
+            <a:off x="310896" y="310896"/>
+            <a:ext cx="8522100" cy="400200"/>
+          </a:xfrm>
+          <a:prstGeom prst="rect">
+            <a:avLst/>
+          </a:prstGeom>
+          <a:noFill/>
+          <a:ln>
+            <a:noFill/>
+          </a:ln>
+        </p:spPr>
+        <p:txBody>
+          <a:bodyPr anchorCtr="0" anchor="t" bIns="0" lIns="0" spcFirstLastPara="1" rIns="0" wrap="square" tIns="0">
+            <a:spAutoFit/>
+          </a:bodyPr>
+          <a:lstStyle/>
+          <a:p>
+            <a:pPr indent="0" lvl="0" marL="0" marR="0" rtl="0" algn="l">
+              <a:lnSpc>
+                <a:spcPct val="100000"/>
+              </a:lnSpc>
+              <a:spcBef>
+                <a:spcPts val="0"/>
+              </a:spcBef>
+              <a:spcAft>
+                <a:spcPts val="0"/>
+              </a:spcAft>
+              <a:buNone/>
+            </a:pPr>
+            <a:r>
+              <a:rPr b="1" i="0" lang="en-GB" sz="2600" u="none" cap="none" strike="noStrike">
+                <a:solidFill>
+                  <a:srgbClr val="F55E61"/>
+                </a:solidFill>
+                <a:latin typeface="Playfair Display"/>
+                <a:ea typeface="Playfair Display"/>
+                <a:cs typeface="Playfair Display"/>
+                <a:sym typeface="Playfair Display"/>
+              </a:rPr>
+              <a:t>Corregida la escala, funcionan los siete</a:t>
+            </a:r>
+            <a:endParaRPr/>
+          </a:p>
+        </p:txBody>
+      </p:sp>
+      <p:sp>
+        <p:nvSpPr>
+          <p:cNvPr id="361" name="Google Shape;361;p29"/>
+          <p:cNvSpPr txBox="1"/>
+          <p:nvPr/>
+        </p:nvSpPr>
+        <p:spPr>
+          <a:xfrm>
+            <a:off x="310896" y="841248"/>
+            <a:ext cx="8522100" cy="169200"/>
+          </a:xfrm>
+          <a:prstGeom prst="rect">
+            <a:avLst/>
+          </a:prstGeom>
+          <a:noFill/>
+          <a:ln>
+            <a:noFill/>
+          </a:ln>
+        </p:spPr>
+        <p:txBody>
+          <a:bodyPr anchorCtr="0" anchor="t" bIns="0" lIns="0" spcFirstLastPara="1" rIns="0" wrap="square" tIns="0">
+            <a:spAutoFit/>
+          </a:bodyPr>
+          <a:lstStyle/>
+          <a:p>
+            <a:pPr indent="0" lvl="0" marL="0" marR="0" rtl="0" algn="l">
+              <a:lnSpc>
+                <a:spcPct val="100000"/>
+              </a:lnSpc>
+              <a:spcBef>
+                <a:spcPts val="0"/>
+              </a:spcBef>
+              <a:spcAft>
+                <a:spcPts val="0"/>
+              </a:spcAft>
+              <a:buNone/>
+            </a:pPr>
+            <a:r>
+              <a:rPr b="0" i="0" lang="en-GB" sz="1100" u="none" cap="none" strike="noStrike">
+                <a:solidFill>
+                  <a:srgbClr val="BFC7CA"/>
+                </a:solidFill>
+                <a:latin typeface="Lato"/>
+                <a:ea typeface="Lato"/>
+                <a:cs typeface="Lato"/>
+                <a:sym typeface="Lato"/>
+              </a:rPr>
+              <a:t>Ejercicio 2 · Resultados</a:t>
+            </a:r>
+            <a:endParaRPr/>
+          </a:p>
+        </p:txBody>
+      </p:sp>
+      <p:pic>
+        <p:nvPicPr>
+          <p:cNvPr descr="fig_seleccion.png" id="362" name="Google Shape;362;p29"/>
+          <p:cNvPicPr preferRelativeResize="0"/>
+          <p:nvPr/>
+        </p:nvPicPr>
+        <p:blipFill rotWithShape="1">
+          <a:blip r:embed="rId3">
+            <a:alphaModFix/>
+          </a:blip>
+          <a:srcRect b="0" l="0" r="0" t="0"/>
+          <a:stretch/>
+        </p:blipFill>
+        <p:spPr>
+          <a:xfrm>
+            <a:off x="310896" y="1392033"/>
+            <a:ext cx="5532121" cy="2576406"/>
+          </a:xfrm>
+          <a:prstGeom prst="rect">
+            <a:avLst/>
+          </a:prstGeom>
+          <a:noFill/>
+          <a:ln>
+            <a:noFill/>
+          </a:ln>
+        </p:spPr>
+      </p:pic>
+      <p:sp>
+        <p:nvSpPr>
+          <p:cNvPr id="363" name="Google Shape;363;p29"/>
+          <p:cNvSpPr/>
+          <p:nvPr/>
+        </p:nvSpPr>
+        <p:spPr>
+          <a:xfrm>
+            <a:off x="6053328" y="1207008"/>
+            <a:ext cx="2779800" cy="1417200"/>
+          </a:xfrm>
+          <a:prstGeom prst="roundRect">
+            <a:avLst>
+              <a:gd fmla="val 7000" name="adj"/>
+            </a:avLst>
+          </a:prstGeom>
+          <a:solidFill>
+            <a:srgbClr val="F2F4F5"/>
+          </a:solidFill>
+          <a:ln>
+            <a:noFill/>
+          </a:ln>
+        </p:spPr>
+        <p:txBody>
+          <a:bodyPr anchorCtr="0" anchor="ctr" bIns="45700" lIns="91425" spcFirstLastPara="1" rIns="91425" wrap="square" tIns="45700">
+            <a:noAutofit/>
+          </a:bodyPr>
+          <a:lstStyle/>
+          <a:p>
+            <a:pPr indent="0" lvl="0" marL="0" marR="0" rtl="0" algn="ctr">
+              <a:lnSpc>
+                <a:spcPct val="100000"/>
+              </a:lnSpc>
+              <a:spcBef>
+                <a:spcPts val="0"/>
+              </a:spcBef>
+              <a:spcAft>
+                <a:spcPts val="0"/>
+              </a:spcAft>
+              <a:buNone/>
+            </a:pPr>
+            <a:r>
+              <a:t/>
+            </a:r>
+            <a:endParaRPr b="0" i="0" sz="1400" u="none" cap="none" strike="noStrike">
+              <a:solidFill>
+                <a:srgbClr val="000000"/>
+              </a:solidFill>
+              <a:latin typeface="Arial"/>
+              <a:ea typeface="Arial"/>
+              <a:cs typeface="Arial"/>
+              <a:sym typeface="Arial"/>
+            </a:endParaRPr>
+          </a:p>
+        </p:txBody>
+      </p:sp>
+      <p:sp>
+        <p:nvSpPr>
+          <p:cNvPr id="364" name="Google Shape;364;p29"/>
+          <p:cNvSpPr txBox="1"/>
+          <p:nvPr/>
+        </p:nvSpPr>
+        <p:spPr>
+          <a:xfrm>
+            <a:off x="6199632" y="1353312"/>
+            <a:ext cx="2487300" cy="697800"/>
+          </a:xfrm>
+          <a:prstGeom prst="rect">
+            <a:avLst/>
+          </a:prstGeom>
+          <a:noFill/>
+          <a:ln>
+            <a:noFill/>
+          </a:ln>
+        </p:spPr>
+        <p:txBody>
+          <a:bodyPr anchorCtr="0" anchor="t" bIns="0" lIns="0" spcFirstLastPara="1" rIns="0" wrap="square" tIns="0">
+            <a:spAutoFit/>
+          </a:bodyPr>
+          <a:lstStyle/>
+          <a:p>
+            <a:pPr indent="0" lvl="0" marL="0" marR="0" rtl="0" algn="l">
+              <a:lnSpc>
+                <a:spcPct val="100000"/>
+              </a:lnSpc>
+              <a:spcBef>
+                <a:spcPts val="0"/>
+              </a:spcBef>
+              <a:spcAft>
+                <a:spcPts val="0"/>
+              </a:spcAft>
+              <a:buNone/>
+            </a:pPr>
+            <a:r>
+              <a:rPr b="1" i="0" lang="en-GB" sz="1050" u="none" cap="none" strike="noStrike">
+                <a:solidFill>
+                  <a:srgbClr val="F55E61"/>
+                </a:solidFill>
+                <a:latin typeface="Lato"/>
+                <a:ea typeface="Lato"/>
+                <a:cs typeface="Lato"/>
+                <a:sym typeface="Lato"/>
+              </a:rPr>
+              <a:t>Reescalado y temperatura</a:t>
+            </a:r>
+            <a:endParaRPr/>
+          </a:p>
+          <a:p>
+            <a:pPr indent="0" lvl="0" marL="0" marR="0" rtl="0" algn="l">
+              <a:lnSpc>
+                <a:spcPct val="100000"/>
+              </a:lnSpc>
+              <a:spcBef>
+                <a:spcPts val="400"/>
+              </a:spcBef>
+              <a:spcAft>
+                <a:spcPts val="0"/>
+              </a:spcAft>
+              <a:buNone/>
+            </a:pPr>
+            <a:r>
+              <a:rPr b="0" i="0" lang="en-GB" sz="1050" u="none" cap="none" strike="noStrike">
+                <a:solidFill>
+                  <a:srgbClr val="5E696C"/>
+                </a:solidFill>
+                <a:latin typeface="Lato"/>
+                <a:ea typeface="Lato"/>
+                <a:cs typeface="Lato"/>
+                <a:sym typeface="Lato"/>
+              </a:rPr>
+              <a:t>Restarle a cada individuo el piso de la población: ruleta 0,72 → 0,96 y universal 0,74 → 0,97. Boltzmann con Tc = 0,002 en vez de 0,5: 0,72 → 0,97.</a:t>
+            </a:r>
+            <a:endParaRPr/>
+          </a:p>
+        </p:txBody>
+      </p:sp>
+      <p:sp>
+        <p:nvSpPr>
+          <p:cNvPr id="365" name="Google Shape;365;p29"/>
+          <p:cNvSpPr/>
+          <p:nvPr/>
+        </p:nvSpPr>
+        <p:spPr>
+          <a:xfrm>
+            <a:off x="6053328" y="2743200"/>
+            <a:ext cx="2779800" cy="1417200"/>
+          </a:xfrm>
+          <a:prstGeom prst="roundRect">
+            <a:avLst>
+              <a:gd fmla="val 7000" name="adj"/>
+            </a:avLst>
+          </a:prstGeom>
+          <a:solidFill>
+            <a:srgbClr val="F2F4F5"/>
+          </a:solidFill>
+          <a:ln>
+            <a:noFill/>
+          </a:ln>
+        </p:spPr>
+        <p:txBody>
+          <a:bodyPr anchorCtr="0" anchor="ctr" bIns="45700" lIns="91425" spcFirstLastPara="1" rIns="91425" wrap="square" tIns="45700">
+            <a:noAutofit/>
+          </a:bodyPr>
+          <a:lstStyle/>
+          <a:p>
+            <a:pPr indent="0" lvl="0" marL="0" marR="0" rtl="0" algn="ctr">
+              <a:lnSpc>
+                <a:spcPct val="100000"/>
+              </a:lnSpc>
+              <a:spcBef>
+                <a:spcPts val="0"/>
+              </a:spcBef>
+              <a:spcAft>
+                <a:spcPts val="0"/>
+              </a:spcAft>
+              <a:buNone/>
+            </a:pPr>
+            <a:r>
+              <a:t/>
+            </a:r>
+            <a:endParaRPr b="0" i="0" sz="1400" u="none" cap="none" strike="noStrike">
+              <a:solidFill>
+                <a:srgbClr val="000000"/>
+              </a:solidFill>
+              <a:latin typeface="Arial"/>
+              <a:ea typeface="Arial"/>
+              <a:cs typeface="Arial"/>
+              <a:sym typeface="Arial"/>
+            </a:endParaRPr>
+          </a:p>
+        </p:txBody>
+      </p:sp>
+      <p:sp>
+        <p:nvSpPr>
+          <p:cNvPr id="366" name="Google Shape;366;p29"/>
+          <p:cNvSpPr txBox="1"/>
+          <p:nvPr/>
+        </p:nvSpPr>
+        <p:spPr>
+          <a:xfrm>
+            <a:off x="6199632" y="2889504"/>
+            <a:ext cx="2487300" cy="697800"/>
+          </a:xfrm>
+          <a:prstGeom prst="rect">
+            <a:avLst/>
+          </a:prstGeom>
+          <a:noFill/>
+          <a:ln>
+            <a:noFill/>
+          </a:ln>
+        </p:spPr>
+        <p:txBody>
+          <a:bodyPr anchorCtr="0" anchor="t" bIns="0" lIns="0" spcFirstLastPara="1" rIns="0" wrap="square" tIns="0">
+            <a:spAutoFit/>
+          </a:bodyPr>
+          <a:lstStyle/>
+          <a:p>
+            <a:pPr indent="0" lvl="0" marL="0" marR="0" rtl="0" algn="l">
+              <a:lnSpc>
+                <a:spcPct val="100000"/>
+              </a:lnSpc>
+              <a:spcBef>
+                <a:spcPts val="0"/>
+              </a:spcBef>
+              <a:spcAft>
+                <a:spcPts val="0"/>
+              </a:spcAft>
+              <a:buNone/>
+            </a:pPr>
+            <a:r>
+              <a:rPr b="1" i="0" lang="en-GB" sz="1050" u="none" cap="none" strike="noStrike">
+                <a:solidFill>
+                  <a:srgbClr val="F55E61"/>
+                </a:solidFill>
+                <a:latin typeface="Lato"/>
+                <a:ea typeface="Lato"/>
+                <a:cs typeface="Lato"/>
+                <a:sym typeface="Lato"/>
+              </a:rPr>
+              <a:t>Sin elitismo en ninguno</a:t>
+            </a:r>
+            <a:endParaRPr/>
+          </a:p>
+          <a:p>
+            <a:pPr indent="0" lvl="0" marL="0" marR="0" rtl="0" algn="l">
+              <a:lnSpc>
+                <a:spcPct val="100000"/>
+              </a:lnSpc>
+              <a:spcBef>
+                <a:spcPts val="400"/>
+              </a:spcBef>
+              <a:spcAft>
+                <a:spcPts val="0"/>
+              </a:spcAft>
+              <a:buNone/>
+            </a:pPr>
+            <a:r>
+              <a:rPr b="0" i="0" lang="en-GB" sz="1050" u="none" cap="none" strike="noStrike">
+                <a:solidFill>
+                  <a:srgbClr val="5E696C"/>
+                </a:solidFill>
+                <a:latin typeface="Lato"/>
+                <a:ea typeface="Lato"/>
+                <a:cs typeface="Lato"/>
+                <a:sym typeface="Lato"/>
+              </a:rPr>
+              <a:t>Los tres métodos que la lámina anterior da por perdidos convergen igual que los otros cuatro. No fallaban por su definición, sino por la escala de la función de fitness.</a:t>
             </a:r>
             <a:endParaRPr/>
           </a:p>
